--- a/paper/중간발표_박현근.pptx
+++ b/paper/중간발표_박현근.pptx
@@ -4576,7 +4576,7 @@
             <a:avLst/>
           </a:prstGeom>
           <a:solidFill>
-            <a:srgbClr val="1F77B4"/>
+            <a:srgbClr val="F4F4F4"/>
           </a:solidFill>
           <a:ln>
             <a:noFill/>
@@ -4732,7 +4732,7 @@
             <a:r>
               <a:rPr sz="1800" b="0">
                 <a:solidFill>
-                  <a:srgbClr val="1F77B4"/>
+                  <a:srgbClr val="393939"/>
                 </a:solidFill>
                 <a:ea typeface="Apple SD Gothic Neo"/>
                 <a:latin typeface="Apple SD Gothic Neo"/>
@@ -4852,7 +4852,7 @@
             <a:r>
               <a:rPr sz="1400" b="0">
                 <a:solidFill>
-                  <a:srgbClr val="FFFFFF"/>
+                  <a:srgbClr val="393939"/>
                 </a:solidFill>
                 <a:ea typeface="Apple SD Gothic Neo"/>
                 <a:latin typeface="Apple SD Gothic Neo"/>
@@ -4882,20 +4882,100 @@
       <p:grpSpPr/>
       <p:sp>
         <p:nvSpPr>
-          <p:cNvPr id="2" name="Rectangle 1"/>
+          <p:cNvPr id="2" name="TextBox 1"/>
+          <p:cNvSpPr txBox="1"/>
+          <p:nvPr/>
+        </p:nvSpPr>
+        <p:spPr>
+          <a:xfrm>
+            <a:off x="365760" y="137160"/>
+            <a:ext cx="1097280" cy="502920"/>
+          </a:xfrm>
+          <a:prstGeom prst="rect">
+            <a:avLst/>
+          </a:prstGeom>
+          <a:noFill/>
+        </p:spPr>
+        <p:txBody>
+          <a:bodyPr wrap="square" anchor="ctr" lIns="50800" rIns="50800" tIns="25400" bIns="25400">
+            <a:spAutoFit/>
+          </a:bodyPr>
+          <a:lstStyle/>
+          <a:p>
+            <a:pPr algn="l">
+              <a:lnSpc>
+                <a:spcPct val="125000"/>
+              </a:lnSpc>
+            </a:pPr>
+            <a:r>
+              <a:rPr sz="2000" b="1">
+                <a:solidFill>
+                  <a:srgbClr val="393939"/>
+                </a:solidFill>
+                <a:ea typeface="Apple SD Gothic Neo"/>
+                <a:latin typeface="Apple SD Gothic Neo"/>
+              </a:rPr>
+              <a:t>01</a:t>
+            </a:r>
+          </a:p>
+        </p:txBody>
+      </p:sp>
+      <p:sp>
+        <p:nvSpPr>
+          <p:cNvPr id="3" name="TextBox 2"/>
+          <p:cNvSpPr txBox="1"/>
+          <p:nvPr/>
+        </p:nvSpPr>
+        <p:spPr>
+          <a:xfrm>
+            <a:off x="1097280" y="137160"/>
+            <a:ext cx="10515600" cy="502920"/>
+          </a:xfrm>
+          <a:prstGeom prst="rect">
+            <a:avLst/>
+          </a:prstGeom>
+          <a:noFill/>
+        </p:spPr>
+        <p:txBody>
+          <a:bodyPr wrap="square" anchor="ctr" lIns="50800" rIns="50800" tIns="25400" bIns="25400">
+            <a:spAutoFit/>
+          </a:bodyPr>
+          <a:lstStyle/>
+          <a:p>
+            <a:pPr algn="l">
+              <a:lnSpc>
+                <a:spcPct val="125000"/>
+              </a:lnSpc>
+            </a:pPr>
+            <a:r>
+              <a:rPr sz="2200" b="1">
+                <a:solidFill>
+                  <a:srgbClr val="393939"/>
+                </a:solidFill>
+                <a:ea typeface="Apple SD Gothic Neo"/>
+                <a:latin typeface="Apple SD Gothic Neo"/>
+              </a:rPr>
+              <a:t>연구 배경 — 왜 이 주제인가</a:t>
+            </a:r>
+          </a:p>
+        </p:txBody>
+      </p:sp>
+      <p:sp>
+        <p:nvSpPr>
+          <p:cNvPr id="4" name="Rectangle 3"/>
           <p:cNvSpPr/>
           <p:nvPr/>
         </p:nvSpPr>
         <p:spPr>
           <a:xfrm>
-            <a:off x="0" y="0"/>
-            <a:ext cx="12191695" cy="640080"/>
+            <a:off x="365760" y="713232"/>
+            <a:ext cx="11430000" cy="18288"/>
           </a:xfrm>
           <a:prstGeom prst="rect">
             <a:avLst/>
           </a:prstGeom>
           <a:solidFill>
-            <a:srgbClr val="1F77B4"/>
+            <a:srgbClr val="7A7A7A"/>
           </a:solidFill>
           <a:ln>
             <a:noFill/>
@@ -4926,14 +5006,14 @@
       </p:sp>
       <p:sp>
         <p:nvSpPr>
-          <p:cNvPr id="3" name="TextBox 2"/>
+          <p:cNvPr id="5" name="TextBox 4"/>
           <p:cNvSpPr txBox="1"/>
           <p:nvPr/>
         </p:nvSpPr>
         <p:spPr>
           <a:xfrm>
-            <a:off x="365760" y="45720"/>
-            <a:ext cx="1097280" cy="548640"/>
+            <a:off x="640080" y="914400"/>
+            <a:ext cx="10972800" cy="457200"/>
           </a:xfrm>
           <a:prstGeom prst="rect">
             <a:avLst/>
@@ -4941,7 +5021,7 @@
           <a:noFill/>
         </p:spPr>
         <p:txBody>
-          <a:bodyPr wrap="square" anchor="ctr" lIns="50800" rIns="50800" tIns="25400" bIns="25400">
+          <a:bodyPr wrap="square" anchor="t" lIns="50800" rIns="50800" tIns="25400" bIns="25400">
             <a:spAutoFit/>
           </a:bodyPr>
           <a:lstStyle/>
@@ -4954,87 +5034,7 @@
             <a:r>
               <a:rPr sz="2200" b="1">
                 <a:solidFill>
-                  <a:srgbClr val="FFFFFF"/>
-                </a:solidFill>
-                <a:ea typeface="Apple SD Gothic Neo"/>
-                <a:latin typeface="Apple SD Gothic Neo"/>
-              </a:rPr>
-              <a:t>01</a:t>
-            </a:r>
-          </a:p>
-        </p:txBody>
-      </p:sp>
-      <p:sp>
-        <p:nvSpPr>
-          <p:cNvPr id="4" name="TextBox 3"/>
-          <p:cNvSpPr txBox="1"/>
-          <p:nvPr/>
-        </p:nvSpPr>
-        <p:spPr>
-          <a:xfrm>
-            <a:off x="1097280" y="45720"/>
-            <a:ext cx="10515600" cy="548640"/>
-          </a:xfrm>
-          <a:prstGeom prst="rect">
-            <a:avLst/>
-          </a:prstGeom>
-          <a:noFill/>
-        </p:spPr>
-        <p:txBody>
-          <a:bodyPr wrap="square" anchor="ctr" lIns="50800" rIns="50800" tIns="25400" bIns="25400">
-            <a:spAutoFit/>
-          </a:bodyPr>
-          <a:lstStyle/>
-          <a:p>
-            <a:pPr algn="l">
-              <a:lnSpc>
-                <a:spcPct val="125000"/>
-              </a:lnSpc>
-            </a:pPr>
-            <a:r>
-              <a:rPr sz="2200" b="1">
-                <a:solidFill>
-                  <a:srgbClr val="FFFFFF"/>
-                </a:solidFill>
-                <a:ea typeface="Apple SD Gothic Neo"/>
-                <a:latin typeface="Apple SD Gothic Neo"/>
-              </a:rPr>
-              <a:t>연구 배경 — 왜 이 주제인가</a:t>
-            </a:r>
-          </a:p>
-        </p:txBody>
-      </p:sp>
-      <p:sp>
-        <p:nvSpPr>
-          <p:cNvPr id="5" name="TextBox 4"/>
-          <p:cNvSpPr txBox="1"/>
-          <p:nvPr/>
-        </p:nvSpPr>
-        <p:spPr>
-          <a:xfrm>
-            <a:off x="640080" y="914400"/>
-            <a:ext cx="10972800" cy="457200"/>
-          </a:xfrm>
-          <a:prstGeom prst="rect">
-            <a:avLst/>
-          </a:prstGeom>
-          <a:noFill/>
-        </p:spPr>
-        <p:txBody>
-          <a:bodyPr wrap="square" anchor="t" lIns="50800" rIns="50800" tIns="25400" bIns="25400">
-            <a:spAutoFit/>
-          </a:bodyPr>
-          <a:lstStyle/>
-          <a:p>
-            <a:pPr algn="l">
-              <a:lnSpc>
-                <a:spcPct val="125000"/>
-              </a:lnSpc>
-            </a:pPr>
-            <a:r>
-              <a:rPr sz="2200" b="1">
-                <a:solidFill>
-                  <a:srgbClr val="1F77B4"/>
+                  <a:srgbClr val="393939"/>
                 </a:solidFill>
                 <a:ea typeface="Apple SD Gothic Neo"/>
                 <a:latin typeface="Apple SD Gothic Neo"/>
@@ -5118,7 +5118,7 @@
             <a:r>
               <a:rPr sz="2000" b="1">
                 <a:solidFill>
-                  <a:srgbClr val="1F77B4"/>
+                  <a:srgbClr val="393939"/>
                 </a:solidFill>
                 <a:ea typeface="Apple SD Gothic Neo"/>
                 <a:latin typeface="Apple SD Gothic Neo"/>
@@ -5259,7 +5259,7 @@
             <a:r>
               <a:rPr sz="2000" b="1">
                 <a:solidFill>
-                  <a:srgbClr val="1F77B4"/>
+                  <a:srgbClr val="393939"/>
                 </a:solidFill>
                 <a:ea typeface="Apple SD Gothic Neo"/>
                 <a:latin typeface="Apple SD Gothic Neo"/>
@@ -5400,7 +5400,7 @@
             <a:r>
               <a:rPr sz="2000" b="1">
                 <a:solidFill>
-                  <a:srgbClr val="1F77B4"/>
+                  <a:srgbClr val="393939"/>
                 </a:solidFill>
                 <a:ea typeface="Apple SD Gothic Neo"/>
                 <a:latin typeface="Apple SD Gothic Neo"/>
@@ -5567,20 +5567,100 @@
       <p:grpSpPr/>
       <p:sp>
         <p:nvSpPr>
-          <p:cNvPr id="2" name="Rectangle 1"/>
+          <p:cNvPr id="2" name="TextBox 1"/>
+          <p:cNvSpPr txBox="1"/>
+          <p:nvPr/>
+        </p:nvSpPr>
+        <p:spPr>
+          <a:xfrm>
+            <a:off x="365760" y="137160"/>
+            <a:ext cx="1097280" cy="502920"/>
+          </a:xfrm>
+          <a:prstGeom prst="rect">
+            <a:avLst/>
+          </a:prstGeom>
+          <a:noFill/>
+        </p:spPr>
+        <p:txBody>
+          <a:bodyPr wrap="square" anchor="ctr" lIns="50800" rIns="50800" tIns="25400" bIns="25400">
+            <a:spAutoFit/>
+          </a:bodyPr>
+          <a:lstStyle/>
+          <a:p>
+            <a:pPr algn="l">
+              <a:lnSpc>
+                <a:spcPct val="125000"/>
+              </a:lnSpc>
+            </a:pPr>
+            <a:r>
+              <a:rPr sz="2000" b="1">
+                <a:solidFill>
+                  <a:srgbClr val="393939"/>
+                </a:solidFill>
+                <a:ea typeface="Apple SD Gothic Neo"/>
+                <a:latin typeface="Apple SD Gothic Neo"/>
+              </a:rPr>
+              <a:t>02</a:t>
+            </a:r>
+          </a:p>
+        </p:txBody>
+      </p:sp>
+      <p:sp>
+        <p:nvSpPr>
+          <p:cNvPr id="3" name="TextBox 2"/>
+          <p:cNvSpPr txBox="1"/>
+          <p:nvPr/>
+        </p:nvSpPr>
+        <p:spPr>
+          <a:xfrm>
+            <a:off x="1097280" y="137160"/>
+            <a:ext cx="10515600" cy="502920"/>
+          </a:xfrm>
+          <a:prstGeom prst="rect">
+            <a:avLst/>
+          </a:prstGeom>
+          <a:noFill/>
+        </p:spPr>
+        <p:txBody>
+          <a:bodyPr wrap="square" anchor="ctr" lIns="50800" rIns="50800" tIns="25400" bIns="25400">
+            <a:spAutoFit/>
+          </a:bodyPr>
+          <a:lstStyle/>
+          <a:p>
+            <a:pPr algn="l">
+              <a:lnSpc>
+                <a:spcPct val="125000"/>
+              </a:lnSpc>
+            </a:pPr>
+            <a:r>
+              <a:rPr sz="2200" b="1">
+                <a:solidFill>
+                  <a:srgbClr val="393939"/>
+                </a:solidFill>
+                <a:ea typeface="Apple SD Gothic Neo"/>
+                <a:latin typeface="Apple SD Gothic Neo"/>
+              </a:rPr>
+              <a:t>데이터와 방법 — 거리 기반 + 시점 정합</a:t>
+            </a:r>
+          </a:p>
+        </p:txBody>
+      </p:sp>
+      <p:sp>
+        <p:nvSpPr>
+          <p:cNvPr id="4" name="Rectangle 3"/>
           <p:cNvSpPr/>
           <p:nvPr/>
         </p:nvSpPr>
         <p:spPr>
           <a:xfrm>
-            <a:off x="0" y="0"/>
-            <a:ext cx="12191695" cy="640080"/>
+            <a:off x="365760" y="713232"/>
+            <a:ext cx="11430000" cy="18288"/>
           </a:xfrm>
           <a:prstGeom prst="rect">
             <a:avLst/>
           </a:prstGeom>
           <a:solidFill>
-            <a:srgbClr val="1F77B4"/>
+            <a:srgbClr val="7A7A7A"/>
           </a:solidFill>
           <a:ln>
             <a:noFill/>
@@ -5611,14 +5691,14 @@
       </p:sp>
       <p:sp>
         <p:nvSpPr>
-          <p:cNvPr id="3" name="TextBox 2"/>
+          <p:cNvPr id="5" name="TextBox 4"/>
           <p:cNvSpPr txBox="1"/>
           <p:nvPr/>
         </p:nvSpPr>
         <p:spPr>
           <a:xfrm>
-            <a:off x="365760" y="45720"/>
-            <a:ext cx="1097280" cy="548640"/>
+            <a:off x="640080" y="914400"/>
+            <a:ext cx="10972800" cy="457200"/>
           </a:xfrm>
           <a:prstGeom prst="rect">
             <a:avLst/>
@@ -5626,7 +5706,7 @@
           <a:noFill/>
         </p:spPr>
         <p:txBody>
-          <a:bodyPr wrap="square" anchor="ctr" lIns="50800" rIns="50800" tIns="25400" bIns="25400">
+          <a:bodyPr wrap="square" anchor="t" lIns="50800" rIns="50800" tIns="25400" bIns="25400">
             <a:spAutoFit/>
           </a:bodyPr>
           <a:lstStyle/>
@@ -5637,89 +5717,9 @@
               </a:lnSpc>
             </a:pPr>
             <a:r>
-              <a:rPr sz="2200" b="1">
-                <a:solidFill>
-                  <a:srgbClr val="FFFFFF"/>
-                </a:solidFill>
-                <a:ea typeface="Apple SD Gothic Neo"/>
-                <a:latin typeface="Apple SD Gothic Neo"/>
-              </a:rPr>
-              <a:t>02</a:t>
-            </a:r>
-          </a:p>
-        </p:txBody>
-      </p:sp>
-      <p:sp>
-        <p:nvSpPr>
-          <p:cNvPr id="4" name="TextBox 3"/>
-          <p:cNvSpPr txBox="1"/>
-          <p:nvPr/>
-        </p:nvSpPr>
-        <p:spPr>
-          <a:xfrm>
-            <a:off x="1097280" y="45720"/>
-            <a:ext cx="10515600" cy="548640"/>
-          </a:xfrm>
-          <a:prstGeom prst="rect">
-            <a:avLst/>
-          </a:prstGeom>
-          <a:noFill/>
-        </p:spPr>
-        <p:txBody>
-          <a:bodyPr wrap="square" anchor="ctr" lIns="50800" rIns="50800" tIns="25400" bIns="25400">
-            <a:spAutoFit/>
-          </a:bodyPr>
-          <a:lstStyle/>
-          <a:p>
-            <a:pPr algn="l">
-              <a:lnSpc>
-                <a:spcPct val="125000"/>
-              </a:lnSpc>
-            </a:pPr>
-            <a:r>
-              <a:rPr sz="2200" b="1">
-                <a:solidFill>
-                  <a:srgbClr val="FFFFFF"/>
-                </a:solidFill>
-                <a:ea typeface="Apple SD Gothic Neo"/>
-                <a:latin typeface="Apple SD Gothic Neo"/>
-              </a:rPr>
-              <a:t>데이터와 방법 — 거리 기반 + 시점 정합</a:t>
-            </a:r>
-          </a:p>
-        </p:txBody>
-      </p:sp>
-      <p:sp>
-        <p:nvSpPr>
-          <p:cNvPr id="5" name="TextBox 4"/>
-          <p:cNvSpPr txBox="1"/>
-          <p:nvPr/>
-        </p:nvSpPr>
-        <p:spPr>
-          <a:xfrm>
-            <a:off x="640080" y="914400"/>
-            <a:ext cx="10972800" cy="457200"/>
-          </a:xfrm>
-          <a:prstGeom prst="rect">
-            <a:avLst/>
-          </a:prstGeom>
-          <a:noFill/>
-        </p:spPr>
-        <p:txBody>
-          <a:bodyPr wrap="square" anchor="t" lIns="50800" rIns="50800" tIns="25400" bIns="25400">
-            <a:spAutoFit/>
-          </a:bodyPr>
-          <a:lstStyle/>
-          <a:p>
-            <a:pPr algn="l">
-              <a:lnSpc>
-                <a:spcPct val="125000"/>
-              </a:lnSpc>
-            </a:pPr>
-            <a:r>
               <a:rPr sz="2000" b="1">
                 <a:solidFill>
-                  <a:srgbClr val="1F77B4"/>
+                  <a:srgbClr val="393939"/>
                 </a:solidFill>
                 <a:ea typeface="Apple SD Gothic Neo"/>
                 <a:latin typeface="Apple SD Gothic Neo"/>
@@ -5952,20 +5952,100 @@
       <p:grpSpPr/>
       <p:sp>
         <p:nvSpPr>
-          <p:cNvPr id="2" name="Rectangle 1"/>
+          <p:cNvPr id="2" name="TextBox 1"/>
+          <p:cNvSpPr txBox="1"/>
+          <p:nvPr/>
+        </p:nvSpPr>
+        <p:spPr>
+          <a:xfrm>
+            <a:off x="365760" y="137160"/>
+            <a:ext cx="1097280" cy="502920"/>
+          </a:xfrm>
+          <a:prstGeom prst="rect">
+            <a:avLst/>
+          </a:prstGeom>
+          <a:noFill/>
+        </p:spPr>
+        <p:txBody>
+          <a:bodyPr wrap="square" anchor="ctr" lIns="50800" rIns="50800" tIns="25400" bIns="25400">
+            <a:spAutoFit/>
+          </a:bodyPr>
+          <a:lstStyle/>
+          <a:p>
+            <a:pPr algn="l">
+              <a:lnSpc>
+                <a:spcPct val="125000"/>
+              </a:lnSpc>
+            </a:pPr>
+            <a:r>
+              <a:rPr sz="2000" b="1">
+                <a:solidFill>
+                  <a:srgbClr val="393939"/>
+                </a:solidFill>
+                <a:ea typeface="Apple SD Gothic Neo"/>
+                <a:latin typeface="Apple SD Gothic Neo"/>
+              </a:rPr>
+              <a:t>03</a:t>
+            </a:r>
+          </a:p>
+        </p:txBody>
+      </p:sp>
+      <p:sp>
+        <p:nvSpPr>
+          <p:cNvPr id="3" name="TextBox 2"/>
+          <p:cNvSpPr txBox="1"/>
+          <p:nvPr/>
+        </p:nvSpPr>
+        <p:spPr>
+          <a:xfrm>
+            <a:off x="1097280" y="137160"/>
+            <a:ext cx="10515600" cy="502920"/>
+          </a:xfrm>
+          <a:prstGeom prst="rect">
+            <a:avLst/>
+          </a:prstGeom>
+          <a:noFill/>
+        </p:spPr>
+        <p:txBody>
+          <a:bodyPr wrap="square" anchor="ctr" lIns="50800" rIns="50800" tIns="25400" bIns="25400">
+            <a:spAutoFit/>
+          </a:bodyPr>
+          <a:lstStyle/>
+          <a:p>
+            <a:pPr algn="l">
+              <a:lnSpc>
+                <a:spcPct val="125000"/>
+              </a:lnSpc>
+            </a:pPr>
+            <a:r>
+              <a:rPr sz="2200" b="1">
+                <a:solidFill>
+                  <a:srgbClr val="393939"/>
+                </a:solidFill>
+                <a:ea typeface="Apple SD Gothic Neo"/>
+                <a:latin typeface="Apple SD Gothic Neo"/>
+              </a:rPr>
+              <a:t>어블레이션 — 거리 전환이 시간순 R² +7.1%p 개선 견인</a:t>
+            </a:r>
+          </a:p>
+        </p:txBody>
+      </p:sp>
+      <p:sp>
+        <p:nvSpPr>
+          <p:cNvPr id="4" name="Rectangle 3"/>
           <p:cNvSpPr/>
           <p:nvPr/>
         </p:nvSpPr>
         <p:spPr>
           <a:xfrm>
-            <a:off x="0" y="0"/>
-            <a:ext cx="12191695" cy="640080"/>
+            <a:off x="365760" y="713232"/>
+            <a:ext cx="11430000" cy="18288"/>
           </a:xfrm>
           <a:prstGeom prst="rect">
             <a:avLst/>
           </a:prstGeom>
           <a:solidFill>
-            <a:srgbClr val="1F77B4"/>
+            <a:srgbClr val="7A7A7A"/>
           </a:solidFill>
           <a:ln>
             <a:noFill/>
@@ -5994,86 +6074,6 @@
           </a:p>
         </p:txBody>
       </p:sp>
-      <p:sp>
-        <p:nvSpPr>
-          <p:cNvPr id="3" name="TextBox 2"/>
-          <p:cNvSpPr txBox="1"/>
-          <p:nvPr/>
-        </p:nvSpPr>
-        <p:spPr>
-          <a:xfrm>
-            <a:off x="365760" y="45720"/>
-            <a:ext cx="1097280" cy="548640"/>
-          </a:xfrm>
-          <a:prstGeom prst="rect">
-            <a:avLst/>
-          </a:prstGeom>
-          <a:noFill/>
-        </p:spPr>
-        <p:txBody>
-          <a:bodyPr wrap="square" anchor="ctr" lIns="50800" rIns="50800" tIns="25400" bIns="25400">
-            <a:spAutoFit/>
-          </a:bodyPr>
-          <a:lstStyle/>
-          <a:p>
-            <a:pPr algn="l">
-              <a:lnSpc>
-                <a:spcPct val="125000"/>
-              </a:lnSpc>
-            </a:pPr>
-            <a:r>
-              <a:rPr sz="2200" b="1">
-                <a:solidFill>
-                  <a:srgbClr val="FFFFFF"/>
-                </a:solidFill>
-                <a:ea typeface="Apple SD Gothic Neo"/>
-                <a:latin typeface="Apple SD Gothic Neo"/>
-              </a:rPr>
-              <a:t>03</a:t>
-            </a:r>
-          </a:p>
-        </p:txBody>
-      </p:sp>
-      <p:sp>
-        <p:nvSpPr>
-          <p:cNvPr id="4" name="TextBox 3"/>
-          <p:cNvSpPr txBox="1"/>
-          <p:nvPr/>
-        </p:nvSpPr>
-        <p:spPr>
-          <a:xfrm>
-            <a:off x="1097280" y="45720"/>
-            <a:ext cx="10515600" cy="548640"/>
-          </a:xfrm>
-          <a:prstGeom prst="rect">
-            <a:avLst/>
-          </a:prstGeom>
-          <a:noFill/>
-        </p:spPr>
-        <p:txBody>
-          <a:bodyPr wrap="square" anchor="ctr" lIns="50800" rIns="50800" tIns="25400" bIns="25400">
-            <a:spAutoFit/>
-          </a:bodyPr>
-          <a:lstStyle/>
-          <a:p>
-            <a:pPr algn="l">
-              <a:lnSpc>
-                <a:spcPct val="125000"/>
-              </a:lnSpc>
-            </a:pPr>
-            <a:r>
-              <a:rPr sz="2200" b="1">
-                <a:solidFill>
-                  <a:srgbClr val="FFFFFF"/>
-                </a:solidFill>
-                <a:ea typeface="Apple SD Gothic Neo"/>
-                <a:latin typeface="Apple SD Gothic Neo"/>
-              </a:rPr>
-              <a:t>어블레이션 — 거리 전환이 시간순 R² +7.1%p 개선 견인</a:t>
-            </a:r>
-          </a:p>
-        </p:txBody>
-      </p:sp>
       <p:pic>
         <p:nvPicPr>
           <p:cNvPr id="5" name="Picture 4" descr="fig10_ablation.png"/>
@@ -6128,7 +6128,7 @@
             <a:r>
               <a:rPr sz="2000" b="1">
                 <a:solidFill>
-                  <a:srgbClr val="1F77B4"/>
+                  <a:srgbClr val="393939"/>
                 </a:solidFill>
                 <a:ea typeface="Apple SD Gothic Neo"/>
                 <a:latin typeface="Apple SD Gothic Neo"/>
@@ -6305,20 +6305,100 @@
       <p:grpSpPr/>
       <p:sp>
         <p:nvSpPr>
-          <p:cNvPr id="2" name="Rectangle 1"/>
+          <p:cNvPr id="2" name="TextBox 1"/>
+          <p:cNvSpPr txBox="1"/>
+          <p:nvPr/>
+        </p:nvSpPr>
+        <p:spPr>
+          <a:xfrm>
+            <a:off x="365760" y="137160"/>
+            <a:ext cx="1097280" cy="502920"/>
+          </a:xfrm>
+          <a:prstGeom prst="rect">
+            <a:avLst/>
+          </a:prstGeom>
+          <a:noFill/>
+        </p:spPr>
+        <p:txBody>
+          <a:bodyPr wrap="square" anchor="ctr" lIns="50800" rIns="50800" tIns="25400" bIns="25400">
+            <a:spAutoFit/>
+          </a:bodyPr>
+          <a:lstStyle/>
+          <a:p>
+            <a:pPr algn="l">
+              <a:lnSpc>
+                <a:spcPct val="125000"/>
+              </a:lnSpc>
+            </a:pPr>
+            <a:r>
+              <a:rPr sz="2000" b="1">
+                <a:solidFill>
+                  <a:srgbClr val="393939"/>
+                </a:solidFill>
+                <a:ea typeface="Apple SD Gothic Neo"/>
+                <a:latin typeface="Apple SD Gothic Neo"/>
+              </a:rPr>
+              <a:t>04</a:t>
+            </a:r>
+          </a:p>
+        </p:txBody>
+      </p:sp>
+      <p:sp>
+        <p:nvSpPr>
+          <p:cNvPr id="3" name="TextBox 2"/>
+          <p:cNvSpPr txBox="1"/>
+          <p:nvPr/>
+        </p:nvSpPr>
+        <p:spPr>
+          <a:xfrm>
+            <a:off x="1097280" y="137160"/>
+            <a:ext cx="10515600" cy="502920"/>
+          </a:xfrm>
+          <a:prstGeom prst="rect">
+            <a:avLst/>
+          </a:prstGeom>
+          <a:noFill/>
+        </p:spPr>
+        <p:txBody>
+          <a:bodyPr wrap="square" anchor="ctr" lIns="50800" rIns="50800" tIns="25400" bIns="25400">
+            <a:spAutoFit/>
+          </a:bodyPr>
+          <a:lstStyle/>
+          <a:p>
+            <a:pPr algn="l">
+              <a:lnSpc>
+                <a:spcPct val="125000"/>
+              </a:lnSpc>
+            </a:pPr>
+            <a:r>
+              <a:rPr sz="2200" b="1">
+                <a:solidFill>
+                  <a:srgbClr val="393939"/>
+                </a:solidFill>
+                <a:ea typeface="Apple SD Gothic Neo"/>
+                <a:latin typeface="Apple SD Gothic Neo"/>
+              </a:rPr>
+              <a:t>권역×연도 SHAP — 강남 변동 vs 비강남 안정</a:t>
+            </a:r>
+          </a:p>
+        </p:txBody>
+      </p:sp>
+      <p:sp>
+        <p:nvSpPr>
+          <p:cNvPr id="4" name="Rectangle 3"/>
           <p:cNvSpPr/>
           <p:nvPr/>
         </p:nvSpPr>
         <p:spPr>
           <a:xfrm>
-            <a:off x="0" y="0"/>
-            <a:ext cx="12191695" cy="640080"/>
+            <a:off x="365760" y="713232"/>
+            <a:ext cx="11430000" cy="18288"/>
           </a:xfrm>
           <a:prstGeom prst="rect">
             <a:avLst/>
           </a:prstGeom>
           <a:solidFill>
-            <a:srgbClr val="1F77B4"/>
+            <a:srgbClr val="7A7A7A"/>
           </a:solidFill>
           <a:ln>
             <a:noFill/>
@@ -6344,86 +6424,6 @@
           <a:lstStyle/>
           <a:p>
             <a:pPr algn="ctr"/>
-          </a:p>
-        </p:txBody>
-      </p:sp>
-      <p:sp>
-        <p:nvSpPr>
-          <p:cNvPr id="3" name="TextBox 2"/>
-          <p:cNvSpPr txBox="1"/>
-          <p:nvPr/>
-        </p:nvSpPr>
-        <p:spPr>
-          <a:xfrm>
-            <a:off x="365760" y="45720"/>
-            <a:ext cx="1097280" cy="548640"/>
-          </a:xfrm>
-          <a:prstGeom prst="rect">
-            <a:avLst/>
-          </a:prstGeom>
-          <a:noFill/>
-        </p:spPr>
-        <p:txBody>
-          <a:bodyPr wrap="square" anchor="ctr" lIns="50800" rIns="50800" tIns="25400" bIns="25400">
-            <a:spAutoFit/>
-          </a:bodyPr>
-          <a:lstStyle/>
-          <a:p>
-            <a:pPr algn="l">
-              <a:lnSpc>
-                <a:spcPct val="125000"/>
-              </a:lnSpc>
-            </a:pPr>
-            <a:r>
-              <a:rPr sz="2200" b="1">
-                <a:solidFill>
-                  <a:srgbClr val="FFFFFF"/>
-                </a:solidFill>
-                <a:ea typeface="Apple SD Gothic Neo"/>
-                <a:latin typeface="Apple SD Gothic Neo"/>
-              </a:rPr>
-              <a:t>04</a:t>
-            </a:r>
-          </a:p>
-        </p:txBody>
-      </p:sp>
-      <p:sp>
-        <p:nvSpPr>
-          <p:cNvPr id="4" name="TextBox 3"/>
-          <p:cNvSpPr txBox="1"/>
-          <p:nvPr/>
-        </p:nvSpPr>
-        <p:spPr>
-          <a:xfrm>
-            <a:off x="1097280" y="45720"/>
-            <a:ext cx="10515600" cy="548640"/>
-          </a:xfrm>
-          <a:prstGeom prst="rect">
-            <a:avLst/>
-          </a:prstGeom>
-          <a:noFill/>
-        </p:spPr>
-        <p:txBody>
-          <a:bodyPr wrap="square" anchor="ctr" lIns="50800" rIns="50800" tIns="25400" bIns="25400">
-            <a:spAutoFit/>
-          </a:bodyPr>
-          <a:lstStyle/>
-          <a:p>
-            <a:pPr algn="l">
-              <a:lnSpc>
-                <a:spcPct val="125000"/>
-              </a:lnSpc>
-            </a:pPr>
-            <a:r>
-              <a:rPr sz="2200" b="1">
-                <a:solidFill>
-                  <a:srgbClr val="FFFFFF"/>
-                </a:solidFill>
-                <a:ea typeface="Apple SD Gothic Neo"/>
-                <a:latin typeface="Apple SD Gothic Neo"/>
-              </a:rPr>
-              <a:t>권역×연도 SHAP — 강남 변동 vs 비강남 안정</a:t>
-            </a:r>
           </a:p>
         </p:txBody>
       </p:sp>
@@ -6505,7 +6505,7 @@
             <a:r>
               <a:rPr sz="1600" b="1">
                 <a:solidFill>
-                  <a:srgbClr val="1F77B4"/>
+                  <a:srgbClr val="393939"/>
                 </a:solidFill>
                 <a:ea typeface="Apple SD Gothic Neo"/>
                 <a:latin typeface="Apple SD Gothic Neo"/>
@@ -6608,7 +6608,7 @@
             <a:r>
               <a:rPr sz="1600" b="1">
                 <a:solidFill>
-                  <a:srgbClr val="1F77B4"/>
+                  <a:srgbClr val="393939"/>
                 </a:solidFill>
                 <a:ea typeface="Apple SD Gothic Neo"/>
                 <a:latin typeface="Apple SD Gothic Neo"/>
@@ -6743,20 +6743,100 @@
       <p:grpSpPr/>
       <p:sp>
         <p:nvSpPr>
-          <p:cNvPr id="2" name="Rectangle 1"/>
+          <p:cNvPr id="2" name="TextBox 1"/>
+          <p:cNvSpPr txBox="1"/>
+          <p:nvPr/>
+        </p:nvSpPr>
+        <p:spPr>
+          <a:xfrm>
+            <a:off x="365760" y="137160"/>
+            <a:ext cx="1097280" cy="502920"/>
+          </a:xfrm>
+          <a:prstGeom prst="rect">
+            <a:avLst/>
+          </a:prstGeom>
+          <a:noFill/>
+        </p:spPr>
+        <p:txBody>
+          <a:bodyPr wrap="square" anchor="ctr" lIns="50800" rIns="50800" tIns="25400" bIns="25400">
+            <a:spAutoFit/>
+          </a:bodyPr>
+          <a:lstStyle/>
+          <a:p>
+            <a:pPr algn="l">
+              <a:lnSpc>
+                <a:spcPct val="125000"/>
+              </a:lnSpc>
+            </a:pPr>
+            <a:r>
+              <a:rPr sz="2000" b="1">
+                <a:solidFill>
+                  <a:srgbClr val="393939"/>
+                </a:solidFill>
+                <a:ea typeface="Apple SD Gothic Neo"/>
+                <a:latin typeface="Apple SD Gothic Neo"/>
+              </a:rPr>
+              <a:t>05</a:t>
+            </a:r>
+          </a:p>
+        </p:txBody>
+      </p:sp>
+      <p:sp>
+        <p:nvSpPr>
+          <p:cNvPr id="3" name="TextBox 2"/>
+          <p:cNvSpPr txBox="1"/>
+          <p:nvPr/>
+        </p:nvSpPr>
+        <p:spPr>
+          <a:xfrm>
+            <a:off x="1097280" y="137160"/>
+            <a:ext cx="10515600" cy="502920"/>
+          </a:xfrm>
+          <a:prstGeom prst="rect">
+            <a:avLst/>
+          </a:prstGeom>
+          <a:noFill/>
+        </p:spPr>
+        <p:txBody>
+          <a:bodyPr wrap="square" anchor="ctr" lIns="50800" rIns="50800" tIns="25400" bIns="25400">
+            <a:spAutoFit/>
+          </a:bodyPr>
+          <a:lstStyle/>
+          <a:p>
+            <a:pPr algn="l">
+              <a:lnSpc>
+                <a:spcPct val="125000"/>
+              </a:lnSpc>
+            </a:pPr>
+            <a:r>
+              <a:rPr sz="2200" b="1">
+                <a:solidFill>
+                  <a:srgbClr val="393939"/>
+                </a:solidFill>
+                <a:ea typeface="Apple SD Gothic Neo"/>
+                <a:latin typeface="Apple SD Gothic Neo"/>
+              </a:rPr>
+              <a:t>전체 SHAP과 비선형 패턴 — 거리 변수가 상위 50%</a:t>
+            </a:r>
+          </a:p>
+        </p:txBody>
+      </p:sp>
+      <p:sp>
+        <p:nvSpPr>
+          <p:cNvPr id="4" name="Rectangle 3"/>
           <p:cNvSpPr/>
           <p:nvPr/>
         </p:nvSpPr>
         <p:spPr>
           <a:xfrm>
-            <a:off x="0" y="0"/>
-            <a:ext cx="12191695" cy="640080"/>
+            <a:off x="365760" y="713232"/>
+            <a:ext cx="11430000" cy="18288"/>
           </a:xfrm>
           <a:prstGeom prst="rect">
             <a:avLst/>
           </a:prstGeom>
           <a:solidFill>
-            <a:srgbClr val="1F77B4"/>
+            <a:srgbClr val="7A7A7A"/>
           </a:solidFill>
           <a:ln>
             <a:noFill/>
@@ -6782,86 +6862,6 @@
           <a:lstStyle/>
           <a:p>
             <a:pPr algn="ctr"/>
-          </a:p>
-        </p:txBody>
-      </p:sp>
-      <p:sp>
-        <p:nvSpPr>
-          <p:cNvPr id="3" name="TextBox 2"/>
-          <p:cNvSpPr txBox="1"/>
-          <p:nvPr/>
-        </p:nvSpPr>
-        <p:spPr>
-          <a:xfrm>
-            <a:off x="365760" y="45720"/>
-            <a:ext cx="1097280" cy="548640"/>
-          </a:xfrm>
-          <a:prstGeom prst="rect">
-            <a:avLst/>
-          </a:prstGeom>
-          <a:noFill/>
-        </p:spPr>
-        <p:txBody>
-          <a:bodyPr wrap="square" anchor="ctr" lIns="50800" rIns="50800" tIns="25400" bIns="25400">
-            <a:spAutoFit/>
-          </a:bodyPr>
-          <a:lstStyle/>
-          <a:p>
-            <a:pPr algn="l">
-              <a:lnSpc>
-                <a:spcPct val="125000"/>
-              </a:lnSpc>
-            </a:pPr>
-            <a:r>
-              <a:rPr sz="2200" b="1">
-                <a:solidFill>
-                  <a:srgbClr val="FFFFFF"/>
-                </a:solidFill>
-                <a:ea typeface="Apple SD Gothic Neo"/>
-                <a:latin typeface="Apple SD Gothic Neo"/>
-              </a:rPr>
-              <a:t>05</a:t>
-            </a:r>
-          </a:p>
-        </p:txBody>
-      </p:sp>
-      <p:sp>
-        <p:nvSpPr>
-          <p:cNvPr id="4" name="TextBox 3"/>
-          <p:cNvSpPr txBox="1"/>
-          <p:nvPr/>
-        </p:nvSpPr>
-        <p:spPr>
-          <a:xfrm>
-            <a:off x="1097280" y="45720"/>
-            <a:ext cx="10515600" cy="548640"/>
-          </a:xfrm>
-          <a:prstGeom prst="rect">
-            <a:avLst/>
-          </a:prstGeom>
-          <a:noFill/>
-        </p:spPr>
-        <p:txBody>
-          <a:bodyPr wrap="square" anchor="ctr" lIns="50800" rIns="50800" tIns="25400" bIns="25400">
-            <a:spAutoFit/>
-          </a:bodyPr>
-          <a:lstStyle/>
-          <a:p>
-            <a:pPr algn="l">
-              <a:lnSpc>
-                <a:spcPct val="125000"/>
-              </a:lnSpc>
-            </a:pPr>
-            <a:r>
-              <a:rPr sz="2200" b="1">
-                <a:solidFill>
-                  <a:srgbClr val="FFFFFF"/>
-                </a:solidFill>
-                <a:ea typeface="Apple SD Gothic Neo"/>
-                <a:latin typeface="Apple SD Gothic Neo"/>
-              </a:rPr>
-              <a:t>전체 SHAP과 비선형 패턴 — 거리 변수가 상위 50%</a:t>
-            </a:r>
           </a:p>
         </p:txBody>
       </p:sp>
@@ -7093,20 +7093,100 @@
       <p:grpSpPr/>
       <p:sp>
         <p:nvSpPr>
-          <p:cNvPr id="2" name="Rectangle 1"/>
+          <p:cNvPr id="2" name="TextBox 1"/>
+          <p:cNvSpPr txBox="1"/>
+          <p:nvPr/>
+        </p:nvSpPr>
+        <p:spPr>
+          <a:xfrm>
+            <a:off x="365760" y="137160"/>
+            <a:ext cx="1097280" cy="502920"/>
+          </a:xfrm>
+          <a:prstGeom prst="rect">
+            <a:avLst/>
+          </a:prstGeom>
+          <a:noFill/>
+        </p:spPr>
+        <p:txBody>
+          <a:bodyPr wrap="square" anchor="ctr" lIns="50800" rIns="50800" tIns="25400" bIns="25400">
+            <a:spAutoFit/>
+          </a:bodyPr>
+          <a:lstStyle/>
+          <a:p>
+            <a:pPr algn="l">
+              <a:lnSpc>
+                <a:spcPct val="125000"/>
+              </a:lnSpc>
+            </a:pPr>
+            <a:r>
+              <a:rPr sz="2000" b="1">
+                <a:solidFill>
+                  <a:srgbClr val="393939"/>
+                </a:solidFill>
+                <a:ea typeface="Apple SD Gothic Neo"/>
+                <a:latin typeface="Apple SD Gothic Neo"/>
+              </a:rPr>
+              <a:t>06</a:t>
+            </a:r>
+          </a:p>
+        </p:txBody>
+      </p:sp>
+      <p:sp>
+        <p:nvSpPr>
+          <p:cNvPr id="3" name="TextBox 2"/>
+          <p:cNvSpPr txBox="1"/>
+          <p:nvPr/>
+        </p:nvSpPr>
+        <p:spPr>
+          <a:xfrm>
+            <a:off x="1097280" y="137160"/>
+            <a:ext cx="10515600" cy="502920"/>
+          </a:xfrm>
+          <a:prstGeom prst="rect">
+            <a:avLst/>
+          </a:prstGeom>
+          <a:noFill/>
+        </p:spPr>
+        <p:txBody>
+          <a:bodyPr wrap="square" anchor="ctr" lIns="50800" rIns="50800" tIns="25400" bIns="25400">
+            <a:spAutoFit/>
+          </a:bodyPr>
+          <a:lstStyle/>
+          <a:p>
+            <a:pPr algn="l">
+              <a:lnSpc>
+                <a:spcPct val="125000"/>
+              </a:lnSpc>
+            </a:pPr>
+            <a:r>
+              <a:rPr sz="2200" b="1">
+                <a:solidFill>
+                  <a:srgbClr val="393939"/>
+                </a:solidFill>
+                <a:ea typeface="Apple SD Gothic Neo"/>
+                <a:latin typeface="Apple SD Gothic Neo"/>
+              </a:rPr>
+              <a:t>한계와 후속 연구 — 정직한 진단</a:t>
+            </a:r>
+          </a:p>
+        </p:txBody>
+      </p:sp>
+      <p:sp>
+        <p:nvSpPr>
+          <p:cNvPr id="4" name="Rectangle 3"/>
           <p:cNvSpPr/>
           <p:nvPr/>
         </p:nvSpPr>
         <p:spPr>
           <a:xfrm>
-            <a:off x="0" y="0"/>
-            <a:ext cx="12191695" cy="640080"/>
+            <a:off x="365760" y="713232"/>
+            <a:ext cx="11430000" cy="18288"/>
           </a:xfrm>
           <a:prstGeom prst="rect">
             <a:avLst/>
           </a:prstGeom>
           <a:solidFill>
-            <a:srgbClr val="1F77B4"/>
+            <a:srgbClr val="7A7A7A"/>
           </a:solidFill>
           <a:ln>
             <a:noFill/>
@@ -7137,86 +7217,6 @@
       </p:sp>
       <p:sp>
         <p:nvSpPr>
-          <p:cNvPr id="3" name="TextBox 2"/>
-          <p:cNvSpPr txBox="1"/>
-          <p:nvPr/>
-        </p:nvSpPr>
-        <p:spPr>
-          <a:xfrm>
-            <a:off x="365760" y="45720"/>
-            <a:ext cx="1097280" cy="548640"/>
-          </a:xfrm>
-          <a:prstGeom prst="rect">
-            <a:avLst/>
-          </a:prstGeom>
-          <a:noFill/>
-        </p:spPr>
-        <p:txBody>
-          <a:bodyPr wrap="square" anchor="ctr" lIns="50800" rIns="50800" tIns="25400" bIns="25400">
-            <a:spAutoFit/>
-          </a:bodyPr>
-          <a:lstStyle/>
-          <a:p>
-            <a:pPr algn="l">
-              <a:lnSpc>
-                <a:spcPct val="125000"/>
-              </a:lnSpc>
-            </a:pPr>
-            <a:r>
-              <a:rPr sz="2200" b="1">
-                <a:solidFill>
-                  <a:srgbClr val="FFFFFF"/>
-                </a:solidFill>
-                <a:ea typeface="Apple SD Gothic Neo"/>
-                <a:latin typeface="Apple SD Gothic Neo"/>
-              </a:rPr>
-              <a:t>06</a:t>
-            </a:r>
-          </a:p>
-        </p:txBody>
-      </p:sp>
-      <p:sp>
-        <p:nvSpPr>
-          <p:cNvPr id="4" name="TextBox 3"/>
-          <p:cNvSpPr txBox="1"/>
-          <p:nvPr/>
-        </p:nvSpPr>
-        <p:spPr>
-          <a:xfrm>
-            <a:off x="1097280" y="45720"/>
-            <a:ext cx="10515600" cy="548640"/>
-          </a:xfrm>
-          <a:prstGeom prst="rect">
-            <a:avLst/>
-          </a:prstGeom>
-          <a:noFill/>
-        </p:spPr>
-        <p:txBody>
-          <a:bodyPr wrap="square" anchor="ctr" lIns="50800" rIns="50800" tIns="25400" bIns="25400">
-            <a:spAutoFit/>
-          </a:bodyPr>
-          <a:lstStyle/>
-          <a:p>
-            <a:pPr algn="l">
-              <a:lnSpc>
-                <a:spcPct val="125000"/>
-              </a:lnSpc>
-            </a:pPr>
-            <a:r>
-              <a:rPr sz="2200" b="1">
-                <a:solidFill>
-                  <a:srgbClr val="FFFFFF"/>
-                </a:solidFill>
-                <a:ea typeface="Apple SD Gothic Neo"/>
-                <a:latin typeface="Apple SD Gothic Neo"/>
-              </a:rPr>
-              <a:t>한계와 후속 연구 — 정직한 진단</a:t>
-            </a:r>
-          </a:p>
-        </p:txBody>
-      </p:sp>
-      <p:sp>
-        <p:nvSpPr>
           <p:cNvPr id="5" name="TextBox 4"/>
           <p:cNvSpPr txBox="1"/>
           <p:nvPr/>
@@ -7408,7 +7408,7 @@
             <a:r>
               <a:rPr sz="2000" b="1">
                 <a:solidFill>
-                  <a:srgbClr val="1F77B4"/>
+                  <a:srgbClr val="393939"/>
                 </a:solidFill>
                 <a:ea typeface="Apple SD Gothic Neo"/>
                 <a:latin typeface="Apple SD Gothic Neo"/>
@@ -7651,14 +7651,14 @@
         </p:nvSpPr>
         <p:spPr>
           <a:xfrm>
-            <a:off x="0" y="0"/>
-            <a:ext cx="12191695" cy="640080"/>
+            <a:off x="0" y="713232"/>
+            <a:ext cx="11430000" cy="18288"/>
           </a:xfrm>
           <a:prstGeom prst="rect">
             <a:avLst/>
           </a:prstGeom>
           <a:solidFill>
-            <a:srgbClr val="1F77B4"/>
+            <a:srgbClr val="7A7A7A"/>
           </a:solidFill>
           <a:ln>
             <a:noFill/>
@@ -7831,7 +7831,7 @@
             <a:r>
               <a:rPr sz="1800" b="1">
                 <a:solidFill>
-                  <a:srgbClr val="1F77B4"/>
+                  <a:srgbClr val="393939"/>
                 </a:solidFill>
                 <a:ea typeface="Apple SD Gothic Neo"/>
                 <a:latin typeface="Apple SD Gothic Neo"/>
@@ -7954,7 +7954,7 @@
             <a:r>
               <a:rPr sz="1600" b="0">
                 <a:solidFill>
-                  <a:srgbClr val="1F77B4"/>
+                  <a:srgbClr val="393939"/>
                 </a:solidFill>
                 <a:ea typeface="Apple SD Gothic Neo"/>
                 <a:latin typeface="Apple SD Gothic Neo"/>

--- a/paper/중간발표_박현근.pptx
+++ b/paper/중간발표_박현근.pptx
@@ -11023,7 +11023,7 @@
         <p:spPr>
           <a:xfrm>
             <a:off x="1371600" y="1280160"/>
-            <a:ext cx="9144000" cy="4971915"/>
+            <a:ext cx="9144000" cy="4929212"/>
           </a:xfrm>
           <a:prstGeom prst="rect">
             <a:avLst/>
@@ -11397,7 +11397,7 @@
         <p:spPr>
           <a:xfrm>
             <a:off x="365760" y="1188720"/>
-            <a:ext cx="6858000" cy="5311664"/>
+            <a:ext cx="6858000" cy="5294032"/>
           </a:xfrm>
           <a:prstGeom prst="rect">
             <a:avLst/>
@@ -12905,7 +12905,7 @@
         <p:spPr>
           <a:xfrm>
             <a:off x="365760" y="1188720"/>
-            <a:ext cx="5760720" cy="3968134"/>
+            <a:ext cx="5760720" cy="3970038"/>
           </a:xfrm>
           <a:prstGeom prst="rect">
             <a:avLst/>
@@ -12929,7 +12929,7 @@
         <p:spPr>
           <a:xfrm>
             <a:off x="6217920" y="1188720"/>
-            <a:ext cx="5760720" cy="3986931"/>
+            <a:ext cx="5760720" cy="3987333"/>
           </a:xfrm>
           <a:prstGeom prst="rect">
             <a:avLst/>
@@ -13383,7 +13383,7 @@
         <p:spPr>
           <a:xfrm>
             <a:off x="365760" y="1188720"/>
-            <a:ext cx="7315200" cy="3977532"/>
+            <a:ext cx="7315200" cy="3943369"/>
           </a:xfrm>
           <a:prstGeom prst="rect">
             <a:avLst/>
@@ -14781,7 +14781,7 @@
         <p:spPr>
           <a:xfrm>
             <a:off x="1371600" y="1188720"/>
-            <a:ext cx="5486400" cy="3891083"/>
+            <a:ext cx="5486400" cy="3864804"/>
           </a:xfrm>
           <a:prstGeom prst="rect">
             <a:avLst/>
@@ -15502,7 +15502,7 @@
         <p:spPr>
           <a:xfrm>
             <a:off x="365760" y="1188720"/>
-            <a:ext cx="11430000" cy="4234171"/>
+            <a:ext cx="11430000" cy="4143415"/>
           </a:xfrm>
           <a:prstGeom prst="rect">
             <a:avLst/>

--- a/paper/중간발표_박현근.pptx
+++ b/paper/중간발표_박현근.pptx
@@ -706,7 +706,7 @@
                 <a:ea typeface="Apple SD Gothic Neo"/>
                 <a:latin typeface="Apple SD Gothic Neo"/>
               </a:rPr>
-              <a:t>모형은 OLS·Random Forest·XGBoost 3종을 무작위·Group·시간순 3분할에서 비교했고, 어블레이션은 4 시나리오로 공간 정합·시간 정합·결합 효과를 분리했습니다.</a:t>
+              <a:t>모형은 OLS·Random Forest·XGBoost 3종을 무작위·Group·시간순 3분할에서 비교했고, Ablation은 4 시나리오로 공간 정합·시간 정합·결합 효과를 분리했습니다.</a:t>
             </a:r>
           </a:p>
         </p:txBody>
@@ -783,7 +783,7 @@
                 <a:ea typeface="Apple SD Gothic Neo"/>
                 <a:latin typeface="Apple SD Gothic Neo"/>
               </a:rPr>
-              <a:t>[RESULTS 어블레이션]</a:t>
+              <a:t>[RESULTS Ablation]</a:t>
             </a:r>
           </a:p>
           <a:p>
@@ -795,7 +795,7 @@
                 <a:ea typeface="Apple SD Gothic Neo"/>
                 <a:latin typeface="Apple SD Gothic Neo"/>
               </a:rPr>
-              <a:t>어블레이션 결과 거리 전환만으로 시간순 R²가 5.6%p 개선되었고, 시점 정합 단독 효과는 R²로는 작지만 미래 시설 정보 누수를 제거하는 방법론적 가치가 있습니다.</a:t>
+              <a:t>Ablation 결과 거리 전환만으로 시간순 R²가 5.6%p 개선되었고, 시점 정합 단독 효과는 R²로는 작지만 미래 시설 정보 누수를 제거하는 방법론적 가치가 있습니다.</a:t>
             </a:r>
           </a:p>
           <a:p>
@@ -1500,7 +1500,7 @@
                 <a:ea typeface="Apple SD Gothic Neo"/>
                 <a:latin typeface="Apple SD Gothic Neo"/>
               </a:rPr>
-              <a:t>한계와 후속 연구를 정리하고, 교수님 피드백에 대한 정량 답변으로 마무리합니다. 도서관 12분, 백화점 38.5분, 6 시설군 시점 정합. 감사합니다. 질문 받겠습니다.</a:t>
+              <a:t>한계와 후속 연구 방향을 정리하며 마무리합니다. 감사합니다. 질문 받겠습니다.</a:t>
             </a:r>
           </a:p>
         </p:txBody>
@@ -2099,7 +2099,7 @@
                 <a:ea typeface="Apple SD Gothic Neo"/>
                 <a:latin typeface="Apple SD Gothic Neo"/>
               </a:rPr>
-              <a:t>거리 변수는 13 시설군에 대해 최근접 거리, 반경 500m·1km·2km 개수, 도보 추정 분 4축으로 산출했습니다. 교수님 피드백인 도서관 도보 km, 백화점 조건에 도보 분으로 직접 답변합니다.</a:t>
+              <a:t>거리 변수는 13 시설군에 대해 최근접 거리, 반경 500m·1km·2km 개수, 도보 추정 분 4축으로 산출했습니다. 도서관 도보권은 12.0분, 백화점은 38.5분으로 차량 권역에 해당합니다.</a:t>
             </a:r>
           </a:p>
         </p:txBody>
@@ -6474,7 +6474,7 @@
                 <a:ea typeface="Apple SD Gothic Neo"/>
                 <a:latin typeface="Apple SD Gothic Neo"/>
               </a:rPr>
-              <a:t>모형·분할 설계 + 어블레이션 4 시나리오</a:t>
+              <a:t>모형·분할 설계 + Ablation 4 시나리오</a:t>
             </a:r>
           </a:p>
         </p:txBody>
@@ -7554,7 +7554,7 @@
                 <a:ea typeface="Apple SD Gothic Neo"/>
                 <a:latin typeface="Apple SD Gothic Neo"/>
               </a:rPr>
-              <a:t>어블레이션 4 시나리오</a:t>
+              <a:t>Ablation 4 시나리오</a:t>
             </a:r>
           </a:p>
         </p:txBody>
@@ -7718,7 +7718,7 @@
                 <a:ea typeface="Apple SD Gothic Neo"/>
                 <a:latin typeface="Apple SD Gothic Neo"/>
               </a:rPr>
-              <a:t>18 변수 (v7 재현)</a:t>
+              <a:t>18 변수 (선행연구 재현)</a:t>
             </a:r>
           </a:p>
         </p:txBody>
@@ -8352,7 +8352,7 @@
                 <a:ea typeface="Apple SD Gothic Neo"/>
                 <a:latin typeface="Apple SD Gothic Neo"/>
               </a:rPr>
-              <a:t>어블레이션 — 거리 전환이 시간순 R² +7.1%p 견인</a:t>
+              <a:t>Ablation — 거리 전환이 시간순 R² +7.1%p 견인</a:t>
             </a:r>
           </a:p>
         </p:txBody>
@@ -10833,7 +10833,7 @@
                 <a:ea typeface="Apple SD Gothic Neo"/>
                 <a:latin typeface="Apple SD Gothic Neo"/>
               </a:rPr>
-              <a:t>어블레이션 시나리오별 XGB R² 시각화</a:t>
+              <a:t>Ablation 시나리오별 XGB R² 시각화</a:t>
             </a:r>
           </a:p>
         </p:txBody>
@@ -12905,7 +12905,7 @@
         <p:spPr>
           <a:xfrm>
             <a:off x="365760" y="1188720"/>
-            <a:ext cx="5760720" cy="3970038"/>
+            <a:ext cx="5760720" cy="4536764"/>
           </a:xfrm>
           <a:prstGeom prst="rect">
             <a:avLst/>
@@ -12929,7 +12929,7 @@
         <p:spPr>
           <a:xfrm>
             <a:off x="6217920" y="1188720"/>
-            <a:ext cx="5760720" cy="3987333"/>
+            <a:ext cx="5760720" cy="4550706"/>
           </a:xfrm>
           <a:prstGeom prst="rect">
             <a:avLst/>
@@ -17237,7 +17237,7 @@
                 <a:ea typeface="Apple SD Gothic Neo"/>
                 <a:latin typeface="Apple SD Gothic Neo"/>
               </a:rPr>
-              <a:t>어블레이션·SHAP·시공간 이질성</a:t>
+              <a:t>Ablation·SHAP·시공간 이질성</a:t>
             </a:r>
           </a:p>
         </p:txBody>
@@ -18216,58 +18216,14 @@
       </p:sp>
       <p:sp>
         <p:nvSpPr>
-          <p:cNvPr id="15" name="Rectangle 14"/>
-          <p:cNvSpPr/>
-          <p:nvPr/>
-        </p:nvSpPr>
-        <p:spPr>
-          <a:xfrm>
-            <a:off x="365760" y="4617720"/>
-            <a:ext cx="11430000" cy="1280160"/>
-          </a:xfrm>
-          <a:prstGeom prst="rect">
-            <a:avLst/>
-          </a:prstGeom>
-          <a:solidFill>
-            <a:srgbClr val="2D3E5C"/>
-          </a:solidFill>
-          <a:ln>
-            <a:noFill/>
-          </a:ln>
-          <a:effectLst/>
-        </p:spPr>
-        <p:style>
-          <a:lnRef idx="1">
-            <a:schemeClr val="accent1"/>
-          </a:lnRef>
-          <a:fillRef idx="3">
-            <a:schemeClr val="accent1"/>
-          </a:fillRef>
-          <a:effectRef idx="2">
-            <a:schemeClr val="accent1"/>
-          </a:effectRef>
-          <a:fontRef idx="minor">
-            <a:schemeClr val="lt1"/>
-          </a:fontRef>
-        </p:style>
-        <p:txBody>
-          <a:bodyPr rtlCol="0" anchor="ctr"/>
-          <a:lstStyle/>
-          <a:p>
-            <a:pPr algn="ctr"/>
-          </a:p>
-        </p:txBody>
-      </p:sp>
-      <p:sp>
-        <p:nvSpPr>
-          <p:cNvPr id="16" name="TextBox 15"/>
-          <p:cNvSpPr txBox="1"/>
-          <p:nvPr/>
-        </p:nvSpPr>
-        <p:spPr>
-          <a:xfrm>
-            <a:off x="548640" y="4709160"/>
-            <a:ext cx="11064240" cy="365760"/>
+          <p:cNvPr id="15" name="TextBox 14"/>
+          <p:cNvSpPr txBox="1"/>
+          <p:nvPr/>
+        </p:nvSpPr>
+        <p:spPr>
+          <a:xfrm>
+            <a:off x="365760" y="5852160"/>
+            <a:ext cx="11430000" cy="457200"/>
           </a:xfrm>
           <a:prstGeom prst="rect">
             <a:avLst/>
@@ -18280,136 +18236,13 @@
           </a:bodyPr>
           <a:lstStyle/>
           <a:p>
-            <a:pPr algn="l">
-              <a:lnSpc>
-                <a:spcPct val="120000"/>
-              </a:lnSpc>
-            </a:pPr>
-            <a:r>
-              <a:rPr sz="1300" b="1">
-                <a:solidFill>
-                  <a:srgbClr val="FFFFFF"/>
-                </a:solidFill>
-                <a:ea typeface="Apple SD Gothic Neo"/>
-                <a:latin typeface="Apple SD Gothic Neo"/>
-              </a:rPr>
-              <a:t>교수 피드백 정량 답변</a:t>
-            </a:r>
-          </a:p>
-        </p:txBody>
-      </p:sp>
-      <p:sp>
-        <p:nvSpPr>
-          <p:cNvPr id="17" name="TextBox 16"/>
-          <p:cNvSpPr txBox="1"/>
-          <p:nvPr/>
-        </p:nvSpPr>
-        <p:spPr>
-          <a:xfrm>
-            <a:off x="548640" y="5074920"/>
-            <a:ext cx="11064240" cy="777240"/>
-          </a:xfrm>
-          <a:prstGeom prst="rect">
-            <a:avLst/>
-          </a:prstGeom>
-          <a:noFill/>
-        </p:spPr>
-        <p:txBody>
-          <a:bodyPr wrap="square" lIns="25400" rIns="25400">
-            <a:spAutoFit/>
-          </a:bodyPr>
-          <a:lstStyle/>
-          <a:p>
-            <a:pPr algn="l">
-              <a:lnSpc>
-                <a:spcPct val="135000"/>
-              </a:lnSpc>
-              <a:spcAft>
-                <a:spcPts val="400"/>
-              </a:spcAft>
-            </a:pPr>
-            <a:r>
-              <a:rPr sz="1100" b="0">
-                <a:solidFill>
-                  <a:srgbClr val="FFFFFF"/>
-                </a:solidFill>
-                <a:ea typeface="Apple SD Gothic Neo"/>
-                <a:latin typeface="Apple SD Gothic Neo"/>
-              </a:rPr>
-              <a:t>· 도서관 도보 — 중앙값 12.0분 (생활SOC 도보권)</a:t>
-            </a:r>
-          </a:p>
-          <a:p>
-            <a:pPr algn="l">
-              <a:lnSpc>
-                <a:spcPct val="135000"/>
-              </a:lnSpc>
-              <a:spcAft>
-                <a:spcPts val="400"/>
-              </a:spcAft>
-            </a:pPr>
-            <a:r>
-              <a:rPr sz="1100" b="0">
-                <a:solidFill>
-                  <a:srgbClr val="FFFFFF"/>
-                </a:solidFill>
-                <a:ea typeface="Apple SD Gothic Neo"/>
-                <a:latin typeface="Apple SD Gothic Neo"/>
-              </a:rPr>
-              <a:t>· 백화점 조건 — 중앙값 38.5분 (도보권 밖, 차량권 프리미엄)</a:t>
-            </a:r>
-          </a:p>
-          <a:p>
-            <a:pPr algn="l">
-              <a:lnSpc>
-                <a:spcPct val="135000"/>
-              </a:lnSpc>
-              <a:spcAft>
-                <a:spcPts val="400"/>
-              </a:spcAft>
-            </a:pPr>
-            <a:r>
-              <a:rPr sz="1100" b="0">
-                <a:solidFill>
-                  <a:srgbClr val="FFFFFF"/>
-                </a:solidFill>
-                <a:ea typeface="Apple SD Gothic Neo"/>
-                <a:latin typeface="Apple SD Gothic Neo"/>
-              </a:rPr>
-              <a:t>· 시간 변동 — 6 시설군 연도별 활동 스냅샷, 5 시설군은 한계 명시</a:t>
-            </a:r>
-          </a:p>
-        </p:txBody>
-      </p:sp>
-      <p:sp>
-        <p:nvSpPr>
-          <p:cNvPr id="18" name="TextBox 17"/>
-          <p:cNvSpPr txBox="1"/>
-          <p:nvPr/>
-        </p:nvSpPr>
-        <p:spPr>
-          <a:xfrm>
-            <a:off x="365760" y="6126480"/>
-            <a:ext cx="11430000" cy="365760"/>
-          </a:xfrm>
-          <a:prstGeom prst="rect">
-            <a:avLst/>
-          </a:prstGeom>
-          <a:noFill/>
-        </p:spPr>
-        <p:txBody>
-          <a:bodyPr wrap="square" anchor="t" lIns="25400" rIns="25400" tIns="0" bIns="0">
-            <a:spAutoFit/>
-          </a:bodyPr>
-          <a:lstStyle/>
-          <a:p>
             <a:pPr algn="ctr">
               <a:lnSpc>
                 <a:spcPct val="120000"/>
               </a:lnSpc>
             </a:pPr>
             <a:r>
-              <a:rPr sz="1800" b="1">
+              <a:rPr sz="2200" b="1">
                 <a:solidFill>
                   <a:srgbClr val="2D3E5C"/>
                 </a:solidFill>
@@ -20736,7 +20569,7 @@
                 <a:ea typeface="Apple SD Gothic Neo"/>
                 <a:latin typeface="Apple SD Gothic Neo"/>
               </a:rPr>
-              <a:t>행정동 집계·거리 기반·시점 정합·통합 4 시나리오 어블레이션</a:t>
+              <a:t>행정동 집계·거리 기반·시점 정합·통합 4 시나리오 Ablation</a:t>
             </a:r>
           </a:p>
         </p:txBody>
@@ -29999,7 +29832,7 @@
                 <a:ea typeface="Apple SD Gothic Neo"/>
                 <a:latin typeface="Apple SD Gothic Neo"/>
               </a:rPr>
-              <a:t>교수 피드백 직접 답변 → 도서관 12.0분(생활SOC 도보권), 백화점 38.5분(차량권)</a:t>
+              <a:t>도서관 12.0분(생활SOC 도보권), 백화점 38.5분(차량권 프리미엄)</a:t>
             </a:r>
           </a:p>
         </p:txBody>

--- a/paper/중간발표_박현근.pptx
+++ b/paper/중간발표_박현근.pptx
@@ -706,7 +706,7 @@
                 <a:ea typeface="Apple SD Gothic Neo"/>
                 <a:latin typeface="Apple SD Gothic Neo"/>
               </a:rPr>
-              <a:t>모형은 OLS·Random Forest·XGBoost 3종을 무작위·Group·시간순 3분할에서 비교했고, Ablation은 4 시나리오로 공간 정합·시간 정합·결합 효과를 분리했습니다.</a:t>
+              <a:t>모형은 OLS·Random Forest·XGBoost 3종을 무작위·단지·시간순 3분할에서 비교했고, Ablation은 4 시나리오로 공간 정합·시간 정합·결합 효과를 분리했습니다.</a:t>
             </a:r>
           </a:p>
         </p:txBody>
@@ -884,7 +884,7 @@
                 <a:ea typeface="Apple SD Gothic Neo"/>
                 <a:latin typeface="Apple SD Gothic Neo"/>
               </a:rPr>
-              <a:t>시각적으로도 D 시나리오가 무작위·시간순·Group 세 분할 모두에서 가장 높은 막대를 보입니다.</a:t>
+              <a:t>시각적으로도 D 시나리오가 무작위·시간순·단지 세 분할 모두에서 가장 높은 막대를 보입니다.</a:t>
             </a:r>
           </a:p>
         </p:txBody>
@@ -7306,7 +7306,7 @@
                 <a:ea typeface="Apple SD Gothic Neo"/>
                 <a:latin typeface="Apple SD Gothic Neo"/>
               </a:rPr>
-              <a:t>단지 Group 분할</a:t>
+              <a:t>단지 분할</a:t>
             </a:r>
           </a:p>
         </p:txBody>
@@ -8764,7 +8764,7 @@
                 <a:ea typeface="Apple SD Gothic Neo"/>
                 <a:latin typeface="Apple SD Gothic Neo"/>
               </a:rPr>
-              <a:t>단지 Group</a:t>
+              <a:t>단지</a:t>
             </a:r>
           </a:p>
         </p:txBody>
@@ -10691,7 +10691,7 @@
                 <a:ea typeface="Apple SD Gothic Neo"/>
                 <a:latin typeface="Apple SD Gothic Neo"/>
               </a:rPr>
-              <a:t>· D (거리+시점+행정동) : 무작위·시간순·Group 모두 최고 — 보완적 결합</a:t>
+              <a:t>· D (거리+시점+행정동) : 무작위·시간순·단지 분할 모두 최고 — 보완적 결합</a:t>
             </a:r>
           </a:p>
         </p:txBody>
@@ -18002,7 +18002,7 @@
                 <a:ea typeface="Apple SD Gothic Neo"/>
                 <a:latin typeface="Apple SD Gothic Neo"/>
               </a:rPr>
-              <a:t>· Group 분할 외삽 한계 + 비교 모형 범위 제한</a:t>
+              <a:t>· 단지 분할 외삽 한계 + 비교 모형 범위 제한</a:t>
             </a:r>
           </a:p>
         </p:txBody>

--- a/paper/중간발표_박현근.pptx
+++ b/paper/중간발표_박현근.pptx
@@ -5540,7 +5540,7 @@
         <p:spPr>
           <a:xfrm>
             <a:off x="0" y="0"/>
-            <a:ext cx="2103120" cy="502920"/>
+            <a:ext cx="2926080" cy="502920"/>
           </a:xfrm>
           <a:prstGeom prst="rect">
             <a:avLst/>
@@ -5584,7 +5584,7 @@
         <p:spPr>
           <a:xfrm>
             <a:off x="137160" y="0"/>
-            <a:ext cx="1920240" cy="502920"/>
+            <a:ext cx="2743200" cy="502920"/>
           </a:xfrm>
           <a:prstGeom prst="rect">
             <a:avLst/>
@@ -5603,7 +5603,7 @@
               </a:lnSpc>
             </a:pPr>
             <a:r>
-              <a:rPr sz="1500" b="1">
+              <a:rPr sz="1400" b="1">
                 <a:solidFill>
                   <a:srgbClr val="FFFFFF"/>
                 </a:solidFill>
@@ -5663,8 +5663,8 @@
         </p:nvSpPr>
         <p:spPr>
           <a:xfrm>
-            <a:off x="5029200" y="91440"/>
-            <a:ext cx="7040880" cy="365760"/>
+            <a:off x="5852160" y="91440"/>
+            <a:ext cx="6217920" cy="365760"/>
           </a:xfrm>
           <a:prstGeom prst="rect">
             <a:avLst/>
@@ -6364,7 +6364,7 @@
         <p:spPr>
           <a:xfrm>
             <a:off x="0" y="0"/>
-            <a:ext cx="2103120" cy="502920"/>
+            <a:ext cx="2926080" cy="502920"/>
           </a:xfrm>
           <a:prstGeom prst="rect">
             <a:avLst/>
@@ -6408,7 +6408,7 @@
         <p:spPr>
           <a:xfrm>
             <a:off x="137160" y="0"/>
-            <a:ext cx="1920240" cy="502920"/>
+            <a:ext cx="2743200" cy="502920"/>
           </a:xfrm>
           <a:prstGeom prst="rect">
             <a:avLst/>
@@ -6427,7 +6427,7 @@
               </a:lnSpc>
             </a:pPr>
             <a:r>
-              <a:rPr sz="1500" b="1">
+              <a:rPr sz="1400" b="1">
                 <a:solidFill>
                   <a:srgbClr val="FFFFFF"/>
                 </a:solidFill>
@@ -6487,8 +6487,8 @@
         </p:nvSpPr>
         <p:spPr>
           <a:xfrm>
-            <a:off x="5029200" y="91440"/>
-            <a:ext cx="7040880" cy="365760"/>
+            <a:off x="5852160" y="91440"/>
+            <a:ext cx="6217920" cy="365760"/>
           </a:xfrm>
           <a:prstGeom prst="rect">
             <a:avLst/>
@@ -8242,7 +8242,7 @@
         <p:spPr>
           <a:xfrm>
             <a:off x="0" y="0"/>
-            <a:ext cx="2103120" cy="502920"/>
+            <a:ext cx="2926080" cy="502920"/>
           </a:xfrm>
           <a:prstGeom prst="rect">
             <a:avLst/>
@@ -8286,7 +8286,7 @@
         <p:spPr>
           <a:xfrm>
             <a:off x="137160" y="0"/>
-            <a:ext cx="1920240" cy="502920"/>
+            <a:ext cx="2743200" cy="502920"/>
           </a:xfrm>
           <a:prstGeom prst="rect">
             <a:avLst/>
@@ -8305,7 +8305,7 @@
               </a:lnSpc>
             </a:pPr>
             <a:r>
-              <a:rPr sz="1500" b="1">
+              <a:rPr sz="1400" b="1">
                 <a:solidFill>
                   <a:srgbClr val="FFFFFF"/>
                 </a:solidFill>
@@ -8365,8 +8365,8 @@
         </p:nvSpPr>
         <p:spPr>
           <a:xfrm>
-            <a:off x="5029200" y="91440"/>
-            <a:ext cx="7040880" cy="365760"/>
+            <a:off x="5852160" y="91440"/>
+            <a:ext cx="6217920" cy="365760"/>
           </a:xfrm>
           <a:prstGeom prst="rect">
             <a:avLst/>
@@ -10723,7 +10723,7 @@
         <p:spPr>
           <a:xfrm>
             <a:off x="0" y="0"/>
-            <a:ext cx="2103120" cy="502920"/>
+            <a:ext cx="2926080" cy="502920"/>
           </a:xfrm>
           <a:prstGeom prst="rect">
             <a:avLst/>
@@ -10767,7 +10767,7 @@
         <p:spPr>
           <a:xfrm>
             <a:off x="137160" y="0"/>
-            <a:ext cx="1920240" cy="502920"/>
+            <a:ext cx="2743200" cy="502920"/>
           </a:xfrm>
           <a:prstGeom prst="rect">
             <a:avLst/>
@@ -10786,7 +10786,7 @@
               </a:lnSpc>
             </a:pPr>
             <a:r>
-              <a:rPr sz="1500" b="1">
+              <a:rPr sz="1400" b="1">
                 <a:solidFill>
                   <a:srgbClr val="FFFFFF"/>
                 </a:solidFill>
@@ -10846,8 +10846,8 @@
         </p:nvSpPr>
         <p:spPr>
           <a:xfrm>
-            <a:off x="5029200" y="91440"/>
-            <a:ext cx="7040880" cy="365760"/>
+            <a:off x="5852160" y="91440"/>
+            <a:ext cx="6217920" cy="365760"/>
           </a:xfrm>
           <a:prstGeom prst="rect">
             <a:avLst/>
@@ -11022,8 +11022,8 @@
         </p:blipFill>
         <p:spPr>
           <a:xfrm>
-            <a:off x="1371600" y="1280160"/>
-            <a:ext cx="9144000" cy="4929212"/>
+            <a:off x="2194560" y="1280160"/>
+            <a:ext cx="7772400" cy="4189830"/>
           </a:xfrm>
           <a:prstGeom prst="rect">
             <a:avLst/>
@@ -11038,7 +11038,7 @@
         </p:nvSpPr>
         <p:spPr>
           <a:xfrm>
-            <a:off x="365760" y="5852160"/>
+            <a:off x="365760" y="5989320"/>
             <a:ext cx="11430000" cy="457200"/>
           </a:xfrm>
           <a:prstGeom prst="rect">
@@ -11097,7 +11097,7 @@
         <p:spPr>
           <a:xfrm>
             <a:off x="0" y="0"/>
-            <a:ext cx="2103120" cy="502920"/>
+            <a:ext cx="2926080" cy="502920"/>
           </a:xfrm>
           <a:prstGeom prst="rect">
             <a:avLst/>
@@ -11141,7 +11141,7 @@
         <p:spPr>
           <a:xfrm>
             <a:off x="137160" y="0"/>
-            <a:ext cx="1920240" cy="502920"/>
+            <a:ext cx="2743200" cy="502920"/>
           </a:xfrm>
           <a:prstGeom prst="rect">
             <a:avLst/>
@@ -11160,7 +11160,7 @@
               </a:lnSpc>
             </a:pPr>
             <a:r>
-              <a:rPr sz="1500" b="1">
+              <a:rPr sz="1400" b="1">
                 <a:solidFill>
                   <a:srgbClr val="FFFFFF"/>
                 </a:solidFill>
@@ -11220,8 +11220,8 @@
         </p:nvSpPr>
         <p:spPr>
           <a:xfrm>
-            <a:off x="5029200" y="91440"/>
-            <a:ext cx="7040880" cy="365760"/>
+            <a:off x="5852160" y="91440"/>
+            <a:ext cx="6217920" cy="365760"/>
           </a:xfrm>
           <a:prstGeom prst="rect">
             <a:avLst/>
@@ -12605,7 +12605,7 @@
         <p:spPr>
           <a:xfrm>
             <a:off x="0" y="0"/>
-            <a:ext cx="2103120" cy="502920"/>
+            <a:ext cx="2926080" cy="502920"/>
           </a:xfrm>
           <a:prstGeom prst="rect">
             <a:avLst/>
@@ -12649,7 +12649,7 @@
         <p:spPr>
           <a:xfrm>
             <a:off x="137160" y="0"/>
-            <a:ext cx="1920240" cy="502920"/>
+            <a:ext cx="2743200" cy="502920"/>
           </a:xfrm>
           <a:prstGeom prst="rect">
             <a:avLst/>
@@ -12668,7 +12668,7 @@
               </a:lnSpc>
             </a:pPr>
             <a:r>
-              <a:rPr sz="1500" b="1">
+              <a:rPr sz="1400" b="1">
                 <a:solidFill>
                   <a:srgbClr val="FFFFFF"/>
                 </a:solidFill>
@@ -12728,8 +12728,8 @@
         </p:nvSpPr>
         <p:spPr>
           <a:xfrm>
-            <a:off x="5029200" y="91440"/>
-            <a:ext cx="7040880" cy="365760"/>
+            <a:off x="5852160" y="91440"/>
+            <a:ext cx="6217920" cy="365760"/>
           </a:xfrm>
           <a:prstGeom prst="rect">
             <a:avLst/>
@@ -13083,7 +13083,7 @@
         <p:spPr>
           <a:xfrm>
             <a:off x="0" y="0"/>
-            <a:ext cx="2103120" cy="502920"/>
+            <a:ext cx="2926080" cy="502920"/>
           </a:xfrm>
           <a:prstGeom prst="rect">
             <a:avLst/>
@@ -13127,7 +13127,7 @@
         <p:spPr>
           <a:xfrm>
             <a:off x="137160" y="0"/>
-            <a:ext cx="1920240" cy="502920"/>
+            <a:ext cx="2743200" cy="502920"/>
           </a:xfrm>
           <a:prstGeom prst="rect">
             <a:avLst/>
@@ -13146,7 +13146,7 @@
               </a:lnSpc>
             </a:pPr>
             <a:r>
-              <a:rPr sz="1500" b="1">
+              <a:rPr sz="1400" b="1">
                 <a:solidFill>
                   <a:srgbClr val="FFFFFF"/>
                 </a:solidFill>
@@ -13206,8 +13206,8 @@
         </p:nvSpPr>
         <p:spPr>
           <a:xfrm>
-            <a:off x="5029200" y="91440"/>
-            <a:ext cx="7040880" cy="365760"/>
+            <a:off x="5852160" y="91440"/>
+            <a:ext cx="6217920" cy="365760"/>
           </a:xfrm>
           <a:prstGeom prst="rect">
             <a:avLst/>
@@ -14481,7 +14481,7 @@
         <p:spPr>
           <a:xfrm>
             <a:off x="0" y="0"/>
-            <a:ext cx="2103120" cy="502920"/>
+            <a:ext cx="2926080" cy="502920"/>
           </a:xfrm>
           <a:prstGeom prst="rect">
             <a:avLst/>
@@ -14525,7 +14525,7 @@
         <p:spPr>
           <a:xfrm>
             <a:off x="137160" y="0"/>
-            <a:ext cx="1920240" cy="502920"/>
+            <a:ext cx="2743200" cy="502920"/>
           </a:xfrm>
           <a:prstGeom prst="rect">
             <a:avLst/>
@@ -14544,7 +14544,7 @@
               </a:lnSpc>
             </a:pPr>
             <a:r>
-              <a:rPr sz="1500" b="1">
+              <a:rPr sz="1400" b="1">
                 <a:solidFill>
                   <a:srgbClr val="FFFFFF"/>
                 </a:solidFill>
@@ -14604,8 +14604,8 @@
         </p:nvSpPr>
         <p:spPr>
           <a:xfrm>
-            <a:off x="5029200" y="91440"/>
-            <a:ext cx="7040880" cy="365760"/>
+            <a:off x="5852160" y="91440"/>
+            <a:ext cx="6217920" cy="365760"/>
           </a:xfrm>
           <a:prstGeom prst="rect">
             <a:avLst/>
@@ -15202,7 +15202,7 @@
         <p:spPr>
           <a:xfrm>
             <a:off x="0" y="0"/>
-            <a:ext cx="2103120" cy="502920"/>
+            <a:ext cx="2926080" cy="502920"/>
           </a:xfrm>
           <a:prstGeom prst="rect">
             <a:avLst/>
@@ -15246,7 +15246,7 @@
         <p:spPr>
           <a:xfrm>
             <a:off x="137160" y="0"/>
-            <a:ext cx="1920240" cy="502920"/>
+            <a:ext cx="2743200" cy="502920"/>
           </a:xfrm>
           <a:prstGeom prst="rect">
             <a:avLst/>
@@ -15265,7 +15265,7 @@
               </a:lnSpc>
             </a:pPr>
             <a:r>
-              <a:rPr sz="1500" b="1">
+              <a:rPr sz="1400" b="1">
                 <a:solidFill>
                   <a:srgbClr val="FFFFFF"/>
                 </a:solidFill>
@@ -15325,8 +15325,8 @@
         </p:nvSpPr>
         <p:spPr>
           <a:xfrm>
-            <a:off x="5029200" y="91440"/>
-            <a:ext cx="7040880" cy="365760"/>
+            <a:off x="5852160" y="91440"/>
+            <a:ext cx="6217920" cy="365760"/>
           </a:xfrm>
           <a:prstGeom prst="rect">
             <a:avLst/>
@@ -15703,7 +15703,7 @@
         <p:spPr>
           <a:xfrm>
             <a:off x="0" y="0"/>
-            <a:ext cx="2103120" cy="502920"/>
+            <a:ext cx="2926080" cy="502920"/>
           </a:xfrm>
           <a:prstGeom prst="rect">
             <a:avLst/>
@@ -15747,7 +15747,7 @@
         <p:spPr>
           <a:xfrm>
             <a:off x="137160" y="0"/>
-            <a:ext cx="1920240" cy="502920"/>
+            <a:ext cx="2743200" cy="502920"/>
           </a:xfrm>
           <a:prstGeom prst="rect">
             <a:avLst/>
@@ -15766,7 +15766,7 @@
               </a:lnSpc>
             </a:pPr>
             <a:r>
-              <a:rPr sz="1500" b="1">
+              <a:rPr sz="1400" b="1">
                 <a:solidFill>
                   <a:srgbClr val="FFFFFF"/>
                 </a:solidFill>
@@ -15826,8 +15826,8 @@
         </p:nvSpPr>
         <p:spPr>
           <a:xfrm>
-            <a:off x="5029200" y="91440"/>
-            <a:ext cx="7040880" cy="365760"/>
+            <a:off x="5852160" y="91440"/>
+            <a:ext cx="6217920" cy="365760"/>
           </a:xfrm>
           <a:prstGeom prst="rect">
             <a:avLst/>
@@ -17517,7 +17517,7 @@
         <p:spPr>
           <a:xfrm>
             <a:off x="0" y="0"/>
-            <a:ext cx="2103120" cy="502920"/>
+            <a:ext cx="2926080" cy="502920"/>
           </a:xfrm>
           <a:prstGeom prst="rect">
             <a:avLst/>
@@ -17561,7 +17561,7 @@
         <p:spPr>
           <a:xfrm>
             <a:off x="137160" y="0"/>
-            <a:ext cx="1920240" cy="502920"/>
+            <a:ext cx="2743200" cy="502920"/>
           </a:xfrm>
           <a:prstGeom prst="rect">
             <a:avLst/>
@@ -17580,7 +17580,7 @@
               </a:lnSpc>
             </a:pPr>
             <a:r>
-              <a:rPr sz="1500" b="1">
+              <a:rPr sz="1400" b="1">
                 <a:solidFill>
                   <a:srgbClr val="FFFFFF"/>
                 </a:solidFill>
@@ -17640,8 +17640,8 @@
         </p:nvSpPr>
         <p:spPr>
           <a:xfrm>
-            <a:off x="5029200" y="91440"/>
-            <a:ext cx="7040880" cy="365760"/>
+            <a:off x="5852160" y="91440"/>
+            <a:ext cx="6217920" cy="365760"/>
           </a:xfrm>
           <a:prstGeom prst="rect">
             <a:avLst/>
@@ -17879,7 +17879,7 @@
                 <a:ea typeface="Apple SD Gothic Neo"/>
                 <a:latin typeface="Apple SD Gothic Neo"/>
               </a:rPr>
-              <a:t>한계 (정직한 진단)</a:t>
+              <a:t>한계</a:t>
             </a:r>
           </a:p>
         </p:txBody>
@@ -18281,7 +18281,7 @@
         <p:spPr>
           <a:xfrm>
             <a:off x="0" y="0"/>
-            <a:ext cx="2103120" cy="502920"/>
+            <a:ext cx="2926080" cy="502920"/>
           </a:xfrm>
           <a:prstGeom prst="rect">
             <a:avLst/>
@@ -18325,7 +18325,7 @@
         <p:spPr>
           <a:xfrm>
             <a:off x="137160" y="0"/>
-            <a:ext cx="1920240" cy="502920"/>
+            <a:ext cx="2743200" cy="502920"/>
           </a:xfrm>
           <a:prstGeom prst="rect">
             <a:avLst/>
@@ -18344,7 +18344,7 @@
               </a:lnSpc>
             </a:pPr>
             <a:r>
-              <a:rPr sz="1500" b="1">
+              <a:rPr sz="1400" b="1">
                 <a:solidFill>
                   <a:srgbClr val="FFFFFF"/>
                 </a:solidFill>
@@ -18404,8 +18404,8 @@
         </p:nvSpPr>
         <p:spPr>
           <a:xfrm>
-            <a:off x="5029200" y="91440"/>
-            <a:ext cx="7040880" cy="365760"/>
+            <a:off x="5852160" y="91440"/>
+            <a:ext cx="6217920" cy="365760"/>
           </a:xfrm>
           <a:prstGeom prst="rect">
             <a:avLst/>
@@ -19435,7 +19435,7 @@
         <p:spPr>
           <a:xfrm>
             <a:off x="0" y="0"/>
-            <a:ext cx="2103120" cy="502920"/>
+            <a:ext cx="2926080" cy="502920"/>
           </a:xfrm>
           <a:prstGeom prst="rect">
             <a:avLst/>
@@ -19479,7 +19479,7 @@
         <p:spPr>
           <a:xfrm>
             <a:off x="137160" y="0"/>
-            <a:ext cx="1920240" cy="502920"/>
+            <a:ext cx="2743200" cy="502920"/>
           </a:xfrm>
           <a:prstGeom prst="rect">
             <a:avLst/>
@@ -19498,7 +19498,7 @@
               </a:lnSpc>
             </a:pPr>
             <a:r>
-              <a:rPr sz="1500" b="1">
+              <a:rPr sz="1400" b="1">
                 <a:solidFill>
                   <a:srgbClr val="FFFFFF"/>
                 </a:solidFill>
@@ -19558,8 +19558,8 @@
         </p:nvSpPr>
         <p:spPr>
           <a:xfrm>
-            <a:off x="5029200" y="91440"/>
-            <a:ext cx="7040880" cy="365760"/>
+            <a:off x="5852160" y="91440"/>
+            <a:ext cx="6217920" cy="365760"/>
           </a:xfrm>
           <a:prstGeom prst="rect">
             <a:avLst/>
@@ -20849,7 +20849,7 @@
         <p:spPr>
           <a:xfrm>
             <a:off x="0" y="0"/>
-            <a:ext cx="2103120" cy="502920"/>
+            <a:ext cx="2926080" cy="502920"/>
           </a:xfrm>
           <a:prstGeom prst="rect">
             <a:avLst/>
@@ -20893,7 +20893,7 @@
         <p:spPr>
           <a:xfrm>
             <a:off x="137160" y="0"/>
-            <a:ext cx="1920240" cy="502920"/>
+            <a:ext cx="2743200" cy="502920"/>
           </a:xfrm>
           <a:prstGeom prst="rect">
             <a:avLst/>
@@ -20912,7 +20912,7 @@
               </a:lnSpc>
             </a:pPr>
             <a:r>
-              <a:rPr sz="1500" b="1">
+              <a:rPr sz="1400" b="1">
                 <a:solidFill>
                   <a:srgbClr val="FFFFFF"/>
                 </a:solidFill>
@@ -20972,8 +20972,8 @@
         </p:nvSpPr>
         <p:spPr>
           <a:xfrm>
-            <a:off x="5029200" y="91440"/>
-            <a:ext cx="7040880" cy="365760"/>
+            <a:off x="5852160" y="91440"/>
+            <a:ext cx="6217920" cy="365760"/>
           </a:xfrm>
           <a:prstGeom prst="rect">
             <a:avLst/>
@@ -21944,7 +21944,7 @@
         <p:spPr>
           <a:xfrm>
             <a:off x="0" y="0"/>
-            <a:ext cx="2103120" cy="502920"/>
+            <a:ext cx="2926080" cy="502920"/>
           </a:xfrm>
           <a:prstGeom prst="rect">
             <a:avLst/>
@@ -21988,7 +21988,7 @@
         <p:spPr>
           <a:xfrm>
             <a:off x="137160" y="0"/>
-            <a:ext cx="1920240" cy="502920"/>
+            <a:ext cx="2743200" cy="502920"/>
           </a:xfrm>
           <a:prstGeom prst="rect">
             <a:avLst/>
@@ -22007,7 +22007,7 @@
               </a:lnSpc>
             </a:pPr>
             <a:r>
-              <a:rPr sz="1500" b="1">
+              <a:rPr sz="1400" b="1">
                 <a:solidFill>
                   <a:srgbClr val="FFFFFF"/>
                 </a:solidFill>
@@ -22067,8 +22067,8 @@
         </p:nvSpPr>
         <p:spPr>
           <a:xfrm>
-            <a:off x="5029200" y="91440"/>
-            <a:ext cx="7040880" cy="365760"/>
+            <a:off x="5852160" y="91440"/>
+            <a:ext cx="6217920" cy="365760"/>
           </a:xfrm>
           <a:prstGeom prst="rect">
             <a:avLst/>
@@ -23086,7 +23086,7 @@
         <p:spPr>
           <a:xfrm>
             <a:off x="0" y="0"/>
-            <a:ext cx="2103120" cy="502920"/>
+            <a:ext cx="2926080" cy="502920"/>
           </a:xfrm>
           <a:prstGeom prst="rect">
             <a:avLst/>
@@ -23130,7 +23130,7 @@
         <p:spPr>
           <a:xfrm>
             <a:off x="137160" y="0"/>
-            <a:ext cx="1920240" cy="502920"/>
+            <a:ext cx="2743200" cy="502920"/>
           </a:xfrm>
           <a:prstGeom prst="rect">
             <a:avLst/>
@@ -23149,7 +23149,7 @@
               </a:lnSpc>
             </a:pPr>
             <a:r>
-              <a:rPr sz="1500" b="1">
+              <a:rPr sz="1400" b="1">
                 <a:solidFill>
                   <a:srgbClr val="FFFFFF"/>
                 </a:solidFill>
@@ -23209,8 +23209,8 @@
         </p:nvSpPr>
         <p:spPr>
           <a:xfrm>
-            <a:off x="5029200" y="91440"/>
-            <a:ext cx="7040880" cy="365760"/>
+            <a:off x="5852160" y="91440"/>
+            <a:ext cx="6217920" cy="365760"/>
           </a:xfrm>
           <a:prstGeom prst="rect">
             <a:avLst/>
@@ -26476,7 +26476,7 @@
         <p:spPr>
           <a:xfrm>
             <a:off x="0" y="0"/>
-            <a:ext cx="2103120" cy="502920"/>
+            <a:ext cx="2926080" cy="502920"/>
           </a:xfrm>
           <a:prstGeom prst="rect">
             <a:avLst/>
@@ -26520,7 +26520,7 @@
         <p:spPr>
           <a:xfrm>
             <a:off x="137160" y="0"/>
-            <a:ext cx="1920240" cy="502920"/>
+            <a:ext cx="2743200" cy="502920"/>
           </a:xfrm>
           <a:prstGeom prst="rect">
             <a:avLst/>
@@ -26539,7 +26539,7 @@
               </a:lnSpc>
             </a:pPr>
             <a:r>
-              <a:rPr sz="1500" b="1">
+              <a:rPr sz="1400" b="1">
                 <a:solidFill>
                   <a:srgbClr val="FFFFFF"/>
                 </a:solidFill>
@@ -26599,8 +26599,8 @@
         </p:nvSpPr>
         <p:spPr>
           <a:xfrm>
-            <a:off x="5029200" y="91440"/>
-            <a:ext cx="7040880" cy="365760"/>
+            <a:off x="5852160" y="91440"/>
+            <a:ext cx="6217920" cy="365760"/>
           </a:xfrm>
           <a:prstGeom prst="rect">
             <a:avLst/>
@@ -27982,7 +27982,7 @@
         <p:spPr>
           <a:xfrm>
             <a:off x="0" y="0"/>
-            <a:ext cx="2103120" cy="502920"/>
+            <a:ext cx="2926080" cy="502920"/>
           </a:xfrm>
           <a:prstGeom prst="rect">
             <a:avLst/>
@@ -28026,7 +28026,7 @@
         <p:spPr>
           <a:xfrm>
             <a:off x="137160" y="0"/>
-            <a:ext cx="1920240" cy="502920"/>
+            <a:ext cx="2743200" cy="502920"/>
           </a:xfrm>
           <a:prstGeom prst="rect">
             <a:avLst/>
@@ -28045,7 +28045,7 @@
               </a:lnSpc>
             </a:pPr>
             <a:r>
-              <a:rPr sz="1500" b="1">
+              <a:rPr sz="1400" b="1">
                 <a:solidFill>
                   <a:srgbClr val="FFFFFF"/>
                 </a:solidFill>
@@ -28105,8 +28105,8 @@
         </p:nvSpPr>
         <p:spPr>
           <a:xfrm>
-            <a:off x="5029200" y="91440"/>
-            <a:ext cx="7040880" cy="365760"/>
+            <a:off x="5852160" y="91440"/>
+            <a:ext cx="6217920" cy="365760"/>
           </a:xfrm>
           <a:prstGeom prst="rect">
             <a:avLst/>

--- a/paper/중간발표_박현근.pptx
+++ b/paper/중간발표_박현근.pptx
@@ -12944,8 +12944,8 @@
         </p:nvSpPr>
         <p:spPr>
           <a:xfrm>
-            <a:off x="365760" y="5486400"/>
-            <a:ext cx="5760720" cy="365760"/>
+            <a:off x="365760" y="5806440"/>
+            <a:ext cx="5760720" cy="320040"/>
           </a:xfrm>
           <a:prstGeom prst="rect">
             <a:avLst/>
@@ -12984,8 +12984,8 @@
         </p:nvSpPr>
         <p:spPr>
           <a:xfrm>
-            <a:off x="6217920" y="5486400"/>
-            <a:ext cx="5760720" cy="365760"/>
+            <a:off x="6217920" y="5806440"/>
+            <a:ext cx="5760720" cy="320040"/>
           </a:xfrm>
           <a:prstGeom prst="rect">
             <a:avLst/>
@@ -13024,8 +13024,8 @@
         </p:nvSpPr>
         <p:spPr>
           <a:xfrm>
-            <a:off x="365760" y="5943600"/>
-            <a:ext cx="11430000" cy="457200"/>
+            <a:off x="365760" y="6217920"/>
+            <a:ext cx="11430000" cy="365760"/>
           </a:xfrm>
           <a:prstGeom prst="rect">
             <a:avLst/>
@@ -15501,8 +15501,8 @@
         </p:blipFill>
         <p:spPr>
           <a:xfrm>
-            <a:off x="365760" y="1188720"/>
-            <a:ext cx="11430000" cy="4143415"/>
+            <a:off x="841248" y="1188720"/>
+            <a:ext cx="10515600" cy="3811942"/>
           </a:xfrm>
           <a:prstGeom prst="rect">
             <a:avLst/>
@@ -15651,7 +15651,7 @@
                 <a:ea typeface="Apple SD Gothic Neo"/>
                 <a:latin typeface="Apple SD Gothic Neo"/>
               </a:rPr>
-              <a:t>· 비강남 : 7년 내내 건물연령이 Top1 (2020 어린이집 1회 예외) — 안정적 구조</a:t>
+              <a:t>· 비강남 : 7년 중 5년 건물연령 1위 (2020 어린이집수·2021 전용면적 예외) — 안정적 구조</a:t>
             </a:r>
           </a:p>
           <a:p>
